--- a/outputs/EDIP_Executive_Report.pptx
+++ b/outputs/EDIP_Executive_Report.pptx
@@ -3901,7 +3901,7 @@
               </a:defRPr>
             </a:pPr>
             <a:r>
-              <a:t>$279,710</a:t>
+              <a:t>$279,955</a:t>
             </a:r>
           </a:p>
           <a:p>
@@ -4018,7 +4018,7 @@
               </a:defRPr>
             </a:pPr>
             <a:r>
-              <a:t>379 of 4000 customers analyzed are High risk (&gt;60% churn probability), representing an estimated $279,710 of 12-month CLV at risk. The model's SHAP explanations show low satisfaction scores, high support-ticket volume, and short contract terms as the dominant churn drivers -- recommend prioritizing retention outreach to the top-risk accounts listed above.</a:t>
+              <a:t>379 of 4000 customers analyzed are High risk (&gt;60% churn probability), representing an estimated $279,955 of 12-month CLV at risk. The model's SHAP explanations show low satisfaction scores, high support-ticket volume, and short contract terms as the dominant churn drivers -- recommend prioritizing retention outreach to the top-risk accounts listed above.</a:t>
             </a:r>
           </a:p>
         </p:txBody>
@@ -4498,7 +4498,7 @@
               </a:defRPr>
             </a:pPr>
             <a:r>
-              <a:t>3. Launch retention outreach to the 92 highest-risk customers (~$69,689 CLV at risk).  (Owner: VP Sales / Customer Success)</a:t>
+              <a:t>3. Launch retention outreach to the 92 highest-risk customers (~$69,472 CLV at risk).  (Owner: VP Sales / Customer Success)</a:t>
             </a:r>
           </a:p>
           <a:p>
